--- a/media/exports/reports/2026-10/people-helped.pptx
+++ b/media/exports/reports/2026-10/people-helped.pptx
@@ -164,7 +164,7 @@
             <c:idx val="2"/>
             <c:spPr>
               <a:solidFill>
-                <a:srgbClr val="0E9F6E"/>
+                <a:srgbClr val="7D8790"/>
               </a:solidFill>
             </c:spPr>
           </c:dPt>
@@ -190,16 +190,16 @@
               <c:strCache>
                 <c:ptCount val="5"/>
                 <c:pt idx="0">
-                  <c:v>Youth outreach</c:v>
+                  <c:v>Mental health first aid</c:v>
                 </c:pt>
                 <c:pt idx="1">
+                  <c:v>Community meals</c:v>
+                </c:pt>
+                <c:pt idx="2">
                   <c:v>Digital literacy</c:v>
                 </c:pt>
-                <c:pt idx="2">
-                  <c:v>Community meals</c:v>
-                </c:pt>
                 <c:pt idx="3">
-                  <c:v>Mental health first aid</c:v>
+                  <c:v>Youth outreach</c:v>
                 </c:pt>
                 <c:pt idx="4">
                   <c:v>Housing support</c:v>
@@ -214,19 +214,19 @@
                 <c:formatCode>0.0"%";[Red](0.0"%")</c:formatCode>
                 <c:ptCount val="5"/>
                 <c:pt idx="0">
-                  <c:v>72.0</c:v>
+                  <c:v>73.3</c:v>
                 </c:pt>
                 <c:pt idx="1">
+                  <c:v>84.8</c:v>
+                </c:pt>
+                <c:pt idx="2">
                   <c:v>87.5</c:v>
                 </c:pt>
-                <c:pt idx="2">
-                  <c:v>90.3</c:v>
-                </c:pt>
                 <c:pt idx="3">
-                  <c:v>91.7</c:v>
+                  <c:v>90.0</c:v>
                 </c:pt>
                 <c:pt idx="4">
-                  <c:v>93.3</c:v>
+                  <c:v>100.0</c:v>
                 </c:pt>
               </c:numCache>
             </c:numRef>
@@ -290,7 +290,7 @@
       <c:valAx>
         <c:axId val="-2113994440"/>
         <c:scaling>
-          <c:max val="107.29499999999999"/>
+          <c:max val="114.99999999999999"/>
           <c:min val="0.0"/>
         </c:scaling>
         <c:delete/>
@@ -1099,7 +1099,7 @@
           <a:lstStyle/>
           <a:p>
             <a:r>
-              <a:t>How many people did we help this month, and how many couldn't we reach?. People helped, October so far: 78; Couldn't reach, October so far: 13; Share reached, October so far: 85.7%. 78 people were helped in October so far, and 13 came to a program but couldn't be helped: 85.7% reached (target 90.0%), against 85.4% in September. Youth outreach reached the smallest share: 72.0% (7 couldn't be helped). The main reason: couldn't make contact (7 people).</a:t>
+              <a:t>How many people did we help this month, and how many couldn't we reach?. People helped, October so far: 78; Couldn't reach, October so far: 12; Share reached, October so far: 86.7%. 78 people were helped in October so far, and 12 came to a program but couldn't be helped: 86.7% reached (target 90.0%), against 84.6% in September. Mental health first aid reached the smallest share: 73.3% (4 couldn't be helped). The main reason: program at capacity (6 people).</a:t>
             </a:r>
           </a:p>
         </p:txBody>
@@ -4638,7 +4638,7 @@
                 </a:solidFill>
                 <a:latin typeface="Roboto"/>
               </a:rPr>
-              <a:t>Data retrieved 2pm, Tue 6 Oct 2026 · Generated 8 Oct 2026, 6:29pm · Sample data · Made with Python (python-pptx)</a:t>
+              <a:t>Data retrieved 2pm, Tue 6 Oct 2026 · Generated 8 Oct 2026, 11:41pm · Sample data · Made with Python (python-pptx)</a:t>
             </a:r>
           </a:p>
         </p:txBody>
@@ -5150,7 +5150,7 @@
                 </a:solidFill>
                 <a:latin typeface="Roboto"/>
               </a:rPr>
-              <a:t>13</a:t>
+              <a:t>12</a:t>
             </a:r>
           </a:p>
         </p:txBody>
@@ -5189,7 +5189,7 @@
                 </a:solidFill>
                 <a:latin typeface="Roboto"/>
               </a:rPr>
-              <a:t>September 94</a:t>
+              <a:t>September 100</a:t>
             </a:r>
           </a:p>
         </p:txBody>
@@ -5316,7 +5316,7 @@
                 </a:solidFill>
                 <a:latin typeface="Roboto"/>
               </a:rPr>
-              <a:t>85.7%</a:t>
+              <a:t>86.7%</a:t>
             </a:r>
           </a:p>
         </p:txBody>
@@ -5386,7 +5386,7 @@
         </p:nvCxnSpPr>
         <p:spPr>
           <a:xfrm>
-            <a:off x="9326895" y="2620868"/>
+            <a:off x="8959299" y="2620868"/>
             <a:ext cx="0" cy="2267834"/>
           </a:xfrm>
           <a:prstGeom prst="line">
@@ -5422,7 +5422,7 @@
         </p:nvSpPr>
         <p:spPr>
           <a:xfrm>
-            <a:off x="8229615" y="4888702"/>
+            <a:off x="7862019" y="4888702"/>
             <a:ext cx="2194560" cy="237744"/>
           </a:xfrm>
           <a:prstGeom prst="rect">
@@ -5575,7 +5575,7 @@
                 </a:solidFill>
                 <a:latin typeface="Roboto"/>
               </a:rPr>
-              <a:t>78 people were helped in October so far, and 13 came to a program but couldn't be helped: 85.7% reached (target 90.0%), against 85.4% in September.</a:t>
+              <a:t>78 people were helped in October so far, and 12 came to a program but couldn't be helped: 86.7% reached (target 90.0%), against 84.6% in September.</a:t>
             </a:r>
           </a:p>
         </p:txBody>
@@ -5702,7 +5702,7 @@
                 </a:solidFill>
                 <a:latin typeface="Roboto"/>
               </a:rPr>
-              <a:t>Youth outreach reached the smallest share: 72.0% (7 couldn't be helped). The main reason: couldn't make contact (7 people).</a:t>
+              <a:t>Mental health first aid reached the smallest share: 73.3% (4 couldn't be helped). The main reason: program at capacity (6 people).</a:t>
             </a:r>
           </a:p>
         </p:txBody>
@@ -5780,7 +5780,7 @@
                 </a:solidFill>
                 <a:latin typeface="Roboto"/>
               </a:rPr>
-              <a:t>Data retrieved 2pm, Tue 6 Oct 2026 · Generated 8 Oct 2026, 6:29pm · Sample data · Made with Python (python-pptx)</a:t>
+              <a:t>Data retrieved 2pm, Tue 6 Oct 2026 · Generated 8 Oct 2026, 11:41pm · Sample data · Made with Python (python-pptx)</a:t>
             </a:r>
           </a:p>
         </p:txBody>
@@ -6095,7 +6095,7 @@
                 </a:solidFill>
                 <a:latin typeface="Roboto"/>
               </a:rPr>
-              <a:t>Data retrieved 2pm, Tue 6 Oct 2026 · Generated 8 Oct 2026, 6:29pm · Sample data · Made with Python (python-pptx)</a:t>
+              <a:t>Data retrieved 2pm, Tue 6 Oct 2026 · Generated 8 Oct 2026, 11:41pm · Sample data · Made with Python (python-pptx)</a:t>
             </a:r>
           </a:p>
         </p:txBody>
@@ -6376,7 +6376,7 @@
                           </a:solidFill>
                           <a:latin typeface="Roboto"/>
                         </a:rPr>
-                        <a:t>Couldn't make contact</a:t>
+                        <a:t>Program at capacity</a:t>
                       </a:r>
                     </a:p>
                   </a:txBody>
@@ -6403,7 +6403,7 @@
                           </a:solidFill>
                           <a:latin typeface="Roboto"/>
                         </a:rPr>
-                        <a:t>7</a:t>
+                        <a:t>6</a:t>
                       </a:r>
                     </a:p>
                   </a:txBody>
@@ -6432,7 +6432,7 @@
                           </a:solidFill>
                           <a:latin typeface="Roboto"/>
                         </a:rPr>
-                        <a:t>Program at capacity</a:t>
+                        <a:t>Waitlist</a:t>
                       </a:r>
                     </a:p>
                   </a:txBody>
@@ -6488,7 +6488,7 @@
                           </a:solidFill>
                           <a:latin typeface="Roboto"/>
                         </a:rPr>
-                        <a:t>Not eligible</a:t>
+                        <a:t>Outside the service area</a:t>
                       </a:r>
                     </a:p>
                   </a:txBody>
@@ -6603,7 +6603,7 @@
                 </a:solidFill>
                 <a:latin typeface="Roboto"/>
               </a:rPr>
-              <a:t>Data retrieved 2pm, Tue 6 Oct 2026 · Generated 8 Oct 2026, 6:29pm · Sample data · Made with Python (python-pptx)</a:t>
+              <a:t>Data retrieved 2pm, Tue 6 Oct 2026 · Generated 8 Oct 2026, 11:41pm · Sample data · Made with Python (python-pptx)</a:t>
             </a:r>
           </a:p>
         </p:txBody>

--- a/media/exports/reports/2026-10/people-helped.pptx
+++ b/media/exports/reports/2026-10/people-helped.pptx
@@ -1029,7 +1029,7 @@
           <a:lstStyle/>
           <a:p>
             <a:r>
-              <a:t>How many people did we help this month, and how many couldn't we reach?. Sample Community Services Ltd. Period: October 2026 to date. People helped by each program, day by day, and the people who came to a program but couldn't be helped (and why). People helped are counted against each program's own grant spend.</a:t>
+              <a:t>How many people did we help this month, and how many couldn't we reach?. Sample Community Services Ltd. Period: October 2026 to date. In short: 78 people helped in October so far; 12 couldn't be reached (86.7% reached, target 90.0%). People helped by each program, day by day, and the people who came to a program but couldn't be helped (and why). People helped are counted against each program's own grant spend.</a:t>
             </a:r>
           </a:p>
         </p:txBody>
@@ -4464,7 +4464,7 @@
         <p:spPr>
           <a:xfrm>
             <a:off x="457200" y="3703320"/>
-            <a:ext cx="11277295" cy="535940"/>
+            <a:ext cx="11277295" cy="758190"/>
           </a:xfrm>
           <a:prstGeom prst="rect">
             <a:avLst/>
@@ -4489,7 +4489,7 @@
                 </a:solidFill>
                 <a:latin typeface="Roboto"/>
               </a:rPr>
-              <a:t>Period: October 2026 to date. People helped by each program, day by day, and the people who came to a program but couldn't be helped (and why). People helped are counted against each program's own grant spend.</a:t>
+              <a:t>Period: October 2026 to date. In short: 78 people helped in October so far; 12 couldn't be reached (86.7% reached, target 90.0%). People helped by each program, day by day, and the people who came to a program but couldn't be helped (and why). People helped are counted against each program's own grant spend.</a:t>
             </a:r>
           </a:p>
         </p:txBody>
@@ -4502,7 +4502,7 @@
         </p:nvSpPr>
         <p:spPr>
           <a:xfrm>
-            <a:off x="457200" y="4330700"/>
+            <a:off x="457200" y="4552950"/>
             <a:ext cx="11277295" cy="1097280"/>
           </a:xfrm>
           <a:prstGeom prst="rect">
@@ -4638,7 +4638,7 @@
                 </a:solidFill>
                 <a:latin typeface="Roboto"/>
               </a:rPr>
-              <a:t>Data retrieved 2pm, Tue 6 Oct 2026 · Generated 8 Oct 2026, 11:41pm · Sample data · Made with Python (python-pptx)</a:t>
+              <a:t>Data retrieved 2pm, Tue 6 Oct 2026 · Generated 10 Oct 2026, 9:55pm · Sample data · Made with Python (python-pptx)</a:t>
             </a:r>
           </a:p>
         </p:txBody>
@@ -5780,7 +5780,7 @@
                 </a:solidFill>
                 <a:latin typeface="Roboto"/>
               </a:rPr>
-              <a:t>Data retrieved 2pm, Tue 6 Oct 2026 · Generated 8 Oct 2026, 11:41pm · Sample data · Made with Python (python-pptx)</a:t>
+              <a:t>Data retrieved 2pm, Tue 6 Oct 2026 · Generated 10 Oct 2026, 9:55pm · Sample data · Made with Python (python-pptx)</a:t>
             </a:r>
           </a:p>
         </p:txBody>
@@ -6095,7 +6095,7 @@
                 </a:solidFill>
                 <a:latin typeface="Roboto"/>
               </a:rPr>
-              <a:t>Data retrieved 2pm, Tue 6 Oct 2026 · Generated 8 Oct 2026, 11:41pm · Sample data · Made with Python (python-pptx)</a:t>
+              <a:t>Data retrieved 2pm, Tue 6 Oct 2026 · Generated 10 Oct 2026, 9:55pm · Sample data · Made with Python (python-pptx)</a:t>
             </a:r>
           </a:p>
         </p:txBody>
@@ -6603,7 +6603,7 @@
                 </a:solidFill>
                 <a:latin typeface="Roboto"/>
               </a:rPr>
-              <a:t>Data retrieved 2pm, Tue 6 Oct 2026 · Generated 8 Oct 2026, 11:41pm · Sample data · Made with Python (python-pptx)</a:t>
+              <a:t>Data retrieved 2pm, Tue 6 Oct 2026 · Generated 10 Oct 2026, 9:55pm · Sample data · Made with Python (python-pptx)</a:t>
             </a:r>
           </a:p>
         </p:txBody>
